--- a/assets/fiches/A5-fiche-complet.pptx
+++ b/assets/fiches/A5-fiche-complet.pptx
@@ -3969,7 +3969,7 @@
                 </a:solidFill>
                 <a:latin typeface="Arial"/>
               </a:rPr>
-              <a:t>. Internet, c'est un immense réseau mondial d'ordinateurs, de téléphones et d'appareils conn…</a:t>
+              <a:t>. Internet, c'est un immense réseau mondial d'ordinateurs, de téléphones et d'appareils connectés entre eux, qui échangent des informations en permanence. On peut l'imaginer comme une gigantesque toile d'araignée planétaire.</a:t>
             </a:r>
           </a:p>
         </p:txBody>
@@ -4463,7 +4463,7 @@
                 </a:solidFill>
                 <a:latin typeface="Arial"/>
               </a:rPr>
-              <a:t>. Un navigateur web, c'est le programme que vous utilisez pour afficher des pages Internet. …</a:t>
+              <a:t>. Un navigateur web, c'est le programme que vous utilisez pour afficher des pages Internet. C'est lui qui "traduit" les données du réseau en images, textes et vidéos lisibles à l'écran.</a:t>
             </a:r>
           </a:p>
         </p:txBody>
@@ -4710,7 +4710,7 @@
                 </a:solidFill>
                 <a:latin typeface="Arial"/>
               </a:rPr>
-              <a:t>. Quand vous ouvrez votre navigateur, voici les éléments essentiels à connaître pour vous re…</a:t>
+              <a:t>. Quand vous ouvrez votre navigateur, voici les éléments essentiels à connaître pour vous repérer :</a:t>
             </a:r>
           </a:p>
         </p:txBody>
@@ -4957,7 +4957,7 @@
                 </a:solidFill>
                 <a:latin typeface="Arial"/>
               </a:rPr>
-              <a:t>. Un moteur de recherche est un service en ligne qui explore et indexe des milliards de page…</a:t>
+              <a:t>. Un moteur de recherche est un service en ligne qui explore et indexe des milliards de pages web pour vous retourner les résultats les plus pertinents selon vos mots-clés.</a:t>
             </a:r>
           </a:p>
         </p:txBody>
@@ -5204,7 +5204,7 @@
                 </a:solidFill>
                 <a:latin typeface="Arial"/>
               </a:rPr>
-              <a:t>. La qualité de vos résultats dépend directement des mots que vous tapez. Quelques astuces s…</a:t>
+              <a:t>. La qualité de vos résultats dépend directement des mots que vous tapez. Quelques astuces simples pour mieux chercher :</a:t>
             </a:r>
           </a:p>
         </p:txBody>
@@ -5451,7 +5451,7 @@
                 </a:solidFill>
                 <a:latin typeface="Arial"/>
               </a:rPr>
-              <a:t>. Une adresse web, ou URL (Uniform Resource Locator), c'est comme l'adresse postale d'une pa…</a:t>
+              <a:t>. Une adresse web, ou URL (Uniform Resource Locator), c'est comme l'adresse postale d'une page sur Internet. Elle est unique et permet à votre navigateur de trouver exactement ce que vous cherchez.</a:t>
             </a:r>
           </a:p>
         </p:txBody>
@@ -5698,7 +5698,7 @@
                 </a:solidFill>
                 <a:latin typeface="Arial"/>
               </a:rPr>
-              <a:t>. Sur Internet, il est essentiel de savoir distinguer un site digne de confiance d'un site p…</a:t>
+              <a:t>. Sur Internet, il est essentiel de savoir distinguer un site digne de confiance d'un site potentiellement douteux. Voici les points clés à vérifier pour naviguer en toute sérénité :</a:t>
             </a:r>
           </a:p>
         </p:txBody>
@@ -5971,7 +5971,7 @@
                 </a:solidFill>
                 <a:latin typeface="Arial"/>
               </a:rPr>
-              <a:t>. Le "phishing" (ou hameçonnage) est une technique frauduleuse très courante. Des escrocs se…</a:t>
+              <a:t>. Le "phishing" (ou hameçonnage) est une technique frauduleuse très courante. Des escrocs se font passer pour une entité de confiance (banque, administration, opérateur téléphonique, etc.) pour vous soutirer des informations personnelles comme vos mots de passe ou numéros de carte bancaire. Ils utilisent généralement de faux emails, SMS ou de faux sites web très réalistes.</a:t>
             </a:r>
           </a:p>
         </p:txBody>
@@ -6218,7 +6218,7 @@
                 </a:solidFill>
                 <a:latin typeface="Arial"/>
               </a:rPr>
-              <a:t>. Un mot de passe fort est votre première ligne de défense contre les cyberattaques. Apprene…</a:t>
+              <a:t>. Un mot de passe fort est votre première ligne de défense contre les cyberattaques. Apprenez à en créer un qui protège efficacement vos données personnelles.</a:t>
             </a:r>
           </a:p>
         </p:txBody>
@@ -6465,7 +6465,7 @@
                 </a:solidFill>
                 <a:latin typeface="Arial"/>
               </a:rPr>
-              <a:t>. Les cookies sont de minuscules fichiers que les sites web stockent sur votre ordinateur ou…</a:t>
+              <a:t>. Les cookies sont de minuscules fichiers que les sites web stockent sur votre ordinateur ou smartphone. Ils servent à "se souvenir" de vous et de vos préférences pour améliorer votre expérience de navigation. C'est grâce à eux qu'un site peut, par exemple, garder les articles dans votre panier ou retenir la langue que vous avez choisie.</a:t>
             </a:r>
           </a:p>
         </p:txBody>
@@ -6712,7 +6712,7 @@
                 </a:solidFill>
                 <a:latin typeface="Arial"/>
               </a:rPr>
-              <a:t>. En France, de nombreux services publics sont accessibles en ligne, simplifiant vos démarch…</a:t>
+              <a:t>. En France, de nombreux services publics sont accessibles en ligne, simplifiant vos démarches quotidiennes. Il est essentiel de connaître les sites officiels pour éviter les fraudes et accéder aux informations fiables.</a:t>
             </a:r>
           </a:p>
         </p:txBody>

--- a/assets/fiches/A5-fiche-complet.pptx
+++ b/assets/fiches/A5-fiche-complet.pptx
@@ -3097,9 +3097,35 @@
         <p:nvPr/>
       </p:nvGrpSpPr>
       <p:grpSpPr/>
-      <p:sp>
-        <p:nvSpPr>
-          <p:cNvPr id="2" name="TextBox 1"/>
+      <p:pic>
+        <p:nvPicPr>
+          <p:cNvPr id="2" name="Picture 1" descr="bg-p1.png"/>
+          <p:cNvPicPr>
+            <a:picLocks noChangeAspect="1"/>
+          </p:cNvPicPr>
+          <p:nvPr/>
+        </p:nvPicPr>
+        <p:blipFill>
+          <a:blip r:embed="rId2">
+            <a:alphaModFix amt="80000"/>
+          </a:blip>
+          <a:stretch>
+            <a:fillRect/>
+          </a:stretch>
+        </p:blipFill>
+        <p:spPr>
+          <a:xfrm>
+            <a:off x="0" y="0"/>
+            <a:ext cx="7556399" cy="10692000"/>
+          </a:xfrm>
+          <a:prstGeom prst="rect">
+            <a:avLst/>
+          </a:prstGeom>
+        </p:spPr>
+      </p:pic>
+      <p:sp>
+        <p:nvSpPr>
+          <p:cNvPr id="3" name="TextBox 2"/>
           <p:cNvSpPr txBox="1"/>
           <p:nvPr/>
         </p:nvSpPr>
@@ -3160,7 +3186,7 @@
       </p:sp>
       <p:sp>
         <p:nvSpPr>
-          <p:cNvPr id="3" name="Rectangle 2"/>
+          <p:cNvPr id="4" name="Rectangle 3"/>
           <p:cNvSpPr/>
           <p:nvPr/>
         </p:nvSpPr>
@@ -3203,7 +3229,7 @@
       </p:sp>
       <p:sp>
         <p:nvSpPr>
-          <p:cNvPr id="4" name="TextBox 3"/>
+          <p:cNvPr id="5" name="TextBox 4"/>
           <p:cNvSpPr txBox="1"/>
           <p:nvPr/>
         </p:nvSpPr>
@@ -3321,7 +3347,7 @@
       </p:sp>
       <p:sp>
         <p:nvSpPr>
-          <p:cNvPr id="5" name="Rectangle 4"/>
+          <p:cNvPr id="6" name="Rectangle 5"/>
           <p:cNvSpPr/>
           <p:nvPr/>
         </p:nvSpPr>
@@ -3364,7 +3390,7 @@
       </p:sp>
       <p:sp>
         <p:nvSpPr>
-          <p:cNvPr id="6" name="TextBox 5"/>
+          <p:cNvPr id="7" name="TextBox 6"/>
           <p:cNvSpPr txBox="1"/>
           <p:nvPr/>
         </p:nvSpPr>
@@ -3482,7 +3508,7 @@
       </p:sp>
       <p:sp>
         <p:nvSpPr>
-          <p:cNvPr id="7" name="Rectangle 6"/>
+          <p:cNvPr id="8" name="Rectangle 7"/>
           <p:cNvSpPr/>
           <p:nvPr/>
         </p:nvSpPr>
@@ -3525,7 +3551,7 @@
       </p:sp>
       <p:sp>
         <p:nvSpPr>
-          <p:cNvPr id="8" name="Rectangle 7"/>
+          <p:cNvPr id="9" name="Rectangle 8"/>
           <p:cNvSpPr/>
           <p:nvPr/>
         </p:nvSpPr>
@@ -3566,7 +3592,7 @@
       </p:sp>
       <p:sp>
         <p:nvSpPr>
-          <p:cNvPr id="9" name="Rectangle 8"/>
+          <p:cNvPr id="10" name="Rectangle 9"/>
           <p:cNvSpPr/>
           <p:nvPr/>
         </p:nvSpPr>
@@ -3607,7 +3633,7 @@
       </p:sp>
       <p:sp>
         <p:nvSpPr>
-          <p:cNvPr id="10" name="TextBox 9"/>
+          <p:cNvPr id="11" name="TextBox 10"/>
           <p:cNvSpPr txBox="1"/>
           <p:nvPr/>
         </p:nvSpPr>
@@ -3649,7 +3675,7 @@
       </p:sp>
       <p:sp>
         <p:nvSpPr>
-          <p:cNvPr id="11" name="TextBox 10"/>
+          <p:cNvPr id="12" name="TextBox 11"/>
           <p:cNvSpPr txBox="1"/>
           <p:nvPr/>
         </p:nvSpPr>
@@ -3729,7 +3755,7 @@
       </p:sp>
       <p:sp>
         <p:nvSpPr>
-          <p:cNvPr id="12" name="Rectangle 11"/>
+          <p:cNvPr id="13" name="Rectangle 12"/>
           <p:cNvSpPr/>
           <p:nvPr/>
         </p:nvSpPr>
@@ -3772,7 +3798,7 @@
       </p:sp>
       <p:sp>
         <p:nvSpPr>
-          <p:cNvPr id="13" name="Rectangle 12"/>
+          <p:cNvPr id="14" name="Rectangle 13"/>
           <p:cNvSpPr/>
           <p:nvPr/>
         </p:nvSpPr>
@@ -3813,7 +3839,7 @@
       </p:sp>
       <p:sp>
         <p:nvSpPr>
-          <p:cNvPr id="14" name="Rectangle 13"/>
+          <p:cNvPr id="15" name="Rectangle 14"/>
           <p:cNvSpPr/>
           <p:nvPr/>
         </p:nvSpPr>
@@ -3854,7 +3880,7 @@
       </p:sp>
       <p:sp>
         <p:nvSpPr>
-          <p:cNvPr id="15" name="TextBox 14"/>
+          <p:cNvPr id="16" name="TextBox 15"/>
           <p:cNvSpPr txBox="1"/>
           <p:nvPr/>
         </p:nvSpPr>
@@ -3896,7 +3922,7 @@
       </p:sp>
       <p:sp>
         <p:nvSpPr>
-          <p:cNvPr id="16" name="TextBox 15"/>
+          <p:cNvPr id="17" name="TextBox 16"/>
           <p:cNvSpPr txBox="1"/>
           <p:nvPr/>
         </p:nvSpPr>
@@ -3976,7 +4002,7 @@
       </p:sp>
       <p:sp>
         <p:nvSpPr>
-          <p:cNvPr id="17" name="Rectangle 16"/>
+          <p:cNvPr id="18" name="Rectangle 17"/>
           <p:cNvSpPr/>
           <p:nvPr/>
         </p:nvSpPr>
@@ -4019,7 +4045,7 @@
       </p:sp>
       <p:sp>
         <p:nvSpPr>
-          <p:cNvPr id="18" name="Rectangle 17"/>
+          <p:cNvPr id="19" name="Rectangle 18"/>
           <p:cNvSpPr/>
           <p:nvPr/>
         </p:nvSpPr>
@@ -4060,7 +4086,7 @@
       </p:sp>
       <p:sp>
         <p:nvSpPr>
-          <p:cNvPr id="19" name="Rectangle 18"/>
+          <p:cNvPr id="20" name="Rectangle 19"/>
           <p:cNvSpPr/>
           <p:nvPr/>
         </p:nvSpPr>
@@ -4101,7 +4127,7 @@
       </p:sp>
       <p:sp>
         <p:nvSpPr>
-          <p:cNvPr id="20" name="TextBox 19"/>
+          <p:cNvPr id="21" name="TextBox 20"/>
           <p:cNvSpPr txBox="1"/>
           <p:nvPr/>
         </p:nvSpPr>
@@ -4143,7 +4169,7 @@
       </p:sp>
       <p:sp>
         <p:nvSpPr>
-          <p:cNvPr id="21" name="TextBox 20"/>
+          <p:cNvPr id="22" name="TextBox 21"/>
           <p:cNvSpPr txBox="1"/>
           <p:nvPr/>
         </p:nvSpPr>
@@ -4223,7 +4249,7 @@
       </p:sp>
       <p:sp>
         <p:nvSpPr>
-          <p:cNvPr id="22" name="Rectangle 21"/>
+          <p:cNvPr id="23" name="Rectangle 22"/>
           <p:cNvSpPr/>
           <p:nvPr/>
         </p:nvSpPr>
@@ -4266,7 +4292,7 @@
       </p:sp>
       <p:sp>
         <p:nvSpPr>
-          <p:cNvPr id="23" name="Rectangle 22"/>
+          <p:cNvPr id="24" name="Rectangle 23"/>
           <p:cNvSpPr/>
           <p:nvPr/>
         </p:nvSpPr>
@@ -4307,7 +4333,7 @@
       </p:sp>
       <p:sp>
         <p:nvSpPr>
-          <p:cNvPr id="24" name="Rectangle 23"/>
+          <p:cNvPr id="25" name="Rectangle 24"/>
           <p:cNvSpPr/>
           <p:nvPr/>
         </p:nvSpPr>
@@ -4348,7 +4374,7 @@
       </p:sp>
       <p:sp>
         <p:nvSpPr>
-          <p:cNvPr id="25" name="TextBox 24"/>
+          <p:cNvPr id="26" name="TextBox 25"/>
           <p:cNvSpPr txBox="1"/>
           <p:nvPr/>
         </p:nvSpPr>
@@ -4390,7 +4416,7 @@
       </p:sp>
       <p:sp>
         <p:nvSpPr>
-          <p:cNvPr id="26" name="TextBox 25"/>
+          <p:cNvPr id="27" name="TextBox 26"/>
           <p:cNvSpPr txBox="1"/>
           <p:nvPr/>
         </p:nvSpPr>
@@ -4470,7 +4496,7 @@
       </p:sp>
       <p:sp>
         <p:nvSpPr>
-          <p:cNvPr id="27" name="Rectangle 26"/>
+          <p:cNvPr id="28" name="Rectangle 27"/>
           <p:cNvSpPr/>
           <p:nvPr/>
         </p:nvSpPr>
@@ -4513,7 +4539,7 @@
       </p:sp>
       <p:sp>
         <p:nvSpPr>
-          <p:cNvPr id="28" name="Rectangle 27"/>
+          <p:cNvPr id="29" name="Rectangle 28"/>
           <p:cNvSpPr/>
           <p:nvPr/>
         </p:nvSpPr>
@@ -4554,7 +4580,7 @@
       </p:sp>
       <p:sp>
         <p:nvSpPr>
-          <p:cNvPr id="29" name="Rectangle 28"/>
+          <p:cNvPr id="30" name="Rectangle 29"/>
           <p:cNvSpPr/>
           <p:nvPr/>
         </p:nvSpPr>
@@ -4595,7 +4621,7 @@
       </p:sp>
       <p:sp>
         <p:nvSpPr>
-          <p:cNvPr id="30" name="TextBox 29"/>
+          <p:cNvPr id="31" name="TextBox 30"/>
           <p:cNvSpPr txBox="1"/>
           <p:nvPr/>
         </p:nvSpPr>
@@ -4637,7 +4663,7 @@
       </p:sp>
       <p:sp>
         <p:nvSpPr>
-          <p:cNvPr id="31" name="TextBox 30"/>
+          <p:cNvPr id="32" name="TextBox 31"/>
           <p:cNvSpPr txBox="1"/>
           <p:nvPr/>
         </p:nvSpPr>
@@ -4717,7 +4743,7 @@
       </p:sp>
       <p:sp>
         <p:nvSpPr>
-          <p:cNvPr id="32" name="Rectangle 31"/>
+          <p:cNvPr id="33" name="Rectangle 32"/>
           <p:cNvSpPr/>
           <p:nvPr/>
         </p:nvSpPr>
@@ -4760,7 +4786,7 @@
       </p:sp>
       <p:sp>
         <p:nvSpPr>
-          <p:cNvPr id="33" name="Rectangle 32"/>
+          <p:cNvPr id="34" name="Rectangle 33"/>
           <p:cNvSpPr/>
           <p:nvPr/>
         </p:nvSpPr>
@@ -4801,7 +4827,7 @@
       </p:sp>
       <p:sp>
         <p:nvSpPr>
-          <p:cNvPr id="34" name="Rectangle 33"/>
+          <p:cNvPr id="35" name="Rectangle 34"/>
           <p:cNvSpPr/>
           <p:nvPr/>
         </p:nvSpPr>
@@ -4842,7 +4868,7 @@
       </p:sp>
       <p:sp>
         <p:nvSpPr>
-          <p:cNvPr id="35" name="TextBox 34"/>
+          <p:cNvPr id="36" name="TextBox 35"/>
           <p:cNvSpPr txBox="1"/>
           <p:nvPr/>
         </p:nvSpPr>
@@ -4884,7 +4910,7 @@
       </p:sp>
       <p:sp>
         <p:nvSpPr>
-          <p:cNvPr id="36" name="TextBox 35"/>
+          <p:cNvPr id="37" name="TextBox 36"/>
           <p:cNvSpPr txBox="1"/>
           <p:nvPr/>
         </p:nvSpPr>
@@ -4964,7 +4990,7 @@
       </p:sp>
       <p:sp>
         <p:nvSpPr>
-          <p:cNvPr id="37" name="Rectangle 36"/>
+          <p:cNvPr id="38" name="Rectangle 37"/>
           <p:cNvSpPr/>
           <p:nvPr/>
         </p:nvSpPr>
@@ -5007,7 +5033,7 @@
       </p:sp>
       <p:sp>
         <p:nvSpPr>
-          <p:cNvPr id="38" name="Rectangle 37"/>
+          <p:cNvPr id="39" name="Rectangle 38"/>
           <p:cNvSpPr/>
           <p:nvPr/>
         </p:nvSpPr>
@@ -5048,7 +5074,7 @@
       </p:sp>
       <p:sp>
         <p:nvSpPr>
-          <p:cNvPr id="39" name="Rectangle 38"/>
+          <p:cNvPr id="40" name="Rectangle 39"/>
           <p:cNvSpPr/>
           <p:nvPr/>
         </p:nvSpPr>
@@ -5089,7 +5115,7 @@
       </p:sp>
       <p:sp>
         <p:nvSpPr>
-          <p:cNvPr id="40" name="TextBox 39"/>
+          <p:cNvPr id="41" name="TextBox 40"/>
           <p:cNvSpPr txBox="1"/>
           <p:nvPr/>
         </p:nvSpPr>
@@ -5131,7 +5157,7 @@
       </p:sp>
       <p:sp>
         <p:nvSpPr>
-          <p:cNvPr id="41" name="TextBox 40"/>
+          <p:cNvPr id="42" name="TextBox 41"/>
           <p:cNvSpPr txBox="1"/>
           <p:nvPr/>
         </p:nvSpPr>
@@ -5211,7 +5237,7 @@
       </p:sp>
       <p:sp>
         <p:nvSpPr>
-          <p:cNvPr id="42" name="Rectangle 41"/>
+          <p:cNvPr id="43" name="Rectangle 42"/>
           <p:cNvSpPr/>
           <p:nvPr/>
         </p:nvSpPr>
@@ -5254,7 +5280,7 @@
       </p:sp>
       <p:sp>
         <p:nvSpPr>
-          <p:cNvPr id="43" name="Rectangle 42"/>
+          <p:cNvPr id="44" name="Rectangle 43"/>
           <p:cNvSpPr/>
           <p:nvPr/>
         </p:nvSpPr>
@@ -5295,7 +5321,7 @@
       </p:sp>
       <p:sp>
         <p:nvSpPr>
-          <p:cNvPr id="44" name="Rectangle 43"/>
+          <p:cNvPr id="45" name="Rectangle 44"/>
           <p:cNvSpPr/>
           <p:nvPr/>
         </p:nvSpPr>
@@ -5336,7 +5362,7 @@
       </p:sp>
       <p:sp>
         <p:nvSpPr>
-          <p:cNvPr id="45" name="TextBox 44"/>
+          <p:cNvPr id="46" name="TextBox 45"/>
           <p:cNvSpPr txBox="1"/>
           <p:nvPr/>
         </p:nvSpPr>
@@ -5378,7 +5404,7 @@
       </p:sp>
       <p:sp>
         <p:nvSpPr>
-          <p:cNvPr id="46" name="TextBox 45"/>
+          <p:cNvPr id="47" name="TextBox 46"/>
           <p:cNvSpPr txBox="1"/>
           <p:nvPr/>
         </p:nvSpPr>
@@ -5458,7 +5484,7 @@
       </p:sp>
       <p:sp>
         <p:nvSpPr>
-          <p:cNvPr id="47" name="Rectangle 46"/>
+          <p:cNvPr id="48" name="Rectangle 47"/>
           <p:cNvSpPr/>
           <p:nvPr/>
         </p:nvSpPr>
@@ -5501,7 +5527,7 @@
       </p:sp>
       <p:sp>
         <p:nvSpPr>
-          <p:cNvPr id="48" name="Rectangle 47"/>
+          <p:cNvPr id="49" name="Rectangle 48"/>
           <p:cNvSpPr/>
           <p:nvPr/>
         </p:nvSpPr>
@@ -5542,7 +5568,7 @@
       </p:sp>
       <p:sp>
         <p:nvSpPr>
-          <p:cNvPr id="49" name="Rectangle 48"/>
+          <p:cNvPr id="50" name="Rectangle 49"/>
           <p:cNvSpPr/>
           <p:nvPr/>
         </p:nvSpPr>
@@ -5583,7 +5609,7 @@
       </p:sp>
       <p:sp>
         <p:nvSpPr>
-          <p:cNvPr id="50" name="TextBox 49"/>
+          <p:cNvPr id="51" name="TextBox 50"/>
           <p:cNvSpPr txBox="1"/>
           <p:nvPr/>
         </p:nvSpPr>
@@ -5625,7 +5651,7 @@
       </p:sp>
       <p:sp>
         <p:nvSpPr>
-          <p:cNvPr id="51" name="TextBox 50"/>
+          <p:cNvPr id="52" name="TextBox 51"/>
           <p:cNvSpPr txBox="1"/>
           <p:nvPr/>
         </p:nvSpPr>
@@ -5729,9 +5755,35 @@
         <p:nvPr/>
       </p:nvGrpSpPr>
       <p:grpSpPr/>
-      <p:sp>
-        <p:nvSpPr>
-          <p:cNvPr id="2" name="Rectangle 1"/>
+      <p:pic>
+        <p:nvPicPr>
+          <p:cNvPr id="2" name="Picture 1" descr="bg-p2.png"/>
+          <p:cNvPicPr>
+            <a:picLocks noChangeAspect="1"/>
+          </p:cNvPicPr>
+          <p:nvPr/>
+        </p:nvPicPr>
+        <p:blipFill>
+          <a:blip r:embed="rId2">
+            <a:alphaModFix amt="80000"/>
+          </a:blip>
+          <a:stretch>
+            <a:fillRect/>
+          </a:stretch>
+        </p:blipFill>
+        <p:spPr>
+          <a:xfrm>
+            <a:off x="0" y="0"/>
+            <a:ext cx="7556399" cy="10692000"/>
+          </a:xfrm>
+          <a:prstGeom prst="rect">
+            <a:avLst/>
+          </a:prstGeom>
+        </p:spPr>
+      </p:pic>
+      <p:sp>
+        <p:nvSpPr>
+          <p:cNvPr id="3" name="Rectangle 2"/>
           <p:cNvSpPr/>
           <p:nvPr/>
         </p:nvSpPr>
@@ -5774,7 +5826,7 @@
       </p:sp>
       <p:sp>
         <p:nvSpPr>
-          <p:cNvPr id="3" name="Rectangle 2"/>
+          <p:cNvPr id="4" name="Rectangle 3"/>
           <p:cNvSpPr/>
           <p:nvPr/>
         </p:nvSpPr>
@@ -5815,7 +5867,7 @@
       </p:sp>
       <p:sp>
         <p:nvSpPr>
-          <p:cNvPr id="4" name="Rectangle 3"/>
+          <p:cNvPr id="5" name="Rectangle 4"/>
           <p:cNvSpPr/>
           <p:nvPr/>
         </p:nvSpPr>
@@ -5856,7 +5908,7 @@
       </p:sp>
       <p:sp>
         <p:nvSpPr>
-          <p:cNvPr id="5" name="TextBox 4"/>
+          <p:cNvPr id="6" name="TextBox 5"/>
           <p:cNvSpPr txBox="1"/>
           <p:nvPr/>
         </p:nvSpPr>
@@ -5898,7 +5950,7 @@
       </p:sp>
       <p:sp>
         <p:nvSpPr>
-          <p:cNvPr id="6" name="TextBox 5"/>
+          <p:cNvPr id="7" name="TextBox 6"/>
           <p:cNvSpPr txBox="1"/>
           <p:nvPr/>
         </p:nvSpPr>
@@ -5978,7 +6030,7 @@
       </p:sp>
       <p:sp>
         <p:nvSpPr>
-          <p:cNvPr id="7" name="Rectangle 6"/>
+          <p:cNvPr id="8" name="Rectangle 7"/>
           <p:cNvSpPr/>
           <p:nvPr/>
         </p:nvSpPr>
@@ -6021,7 +6073,7 @@
       </p:sp>
       <p:sp>
         <p:nvSpPr>
-          <p:cNvPr id="8" name="Rectangle 7"/>
+          <p:cNvPr id="9" name="Rectangle 8"/>
           <p:cNvSpPr/>
           <p:nvPr/>
         </p:nvSpPr>
@@ -6062,7 +6114,7 @@
       </p:sp>
       <p:sp>
         <p:nvSpPr>
-          <p:cNvPr id="9" name="Rectangle 8"/>
+          <p:cNvPr id="10" name="Rectangle 9"/>
           <p:cNvSpPr/>
           <p:nvPr/>
         </p:nvSpPr>
@@ -6103,7 +6155,7 @@
       </p:sp>
       <p:sp>
         <p:nvSpPr>
-          <p:cNvPr id="10" name="TextBox 9"/>
+          <p:cNvPr id="11" name="TextBox 10"/>
           <p:cNvSpPr txBox="1"/>
           <p:nvPr/>
         </p:nvSpPr>
@@ -6145,7 +6197,7 @@
       </p:sp>
       <p:sp>
         <p:nvSpPr>
-          <p:cNvPr id="11" name="TextBox 10"/>
+          <p:cNvPr id="12" name="TextBox 11"/>
           <p:cNvSpPr txBox="1"/>
           <p:nvPr/>
         </p:nvSpPr>
@@ -6225,7 +6277,7 @@
       </p:sp>
       <p:sp>
         <p:nvSpPr>
-          <p:cNvPr id="12" name="Rectangle 11"/>
+          <p:cNvPr id="13" name="Rectangle 12"/>
           <p:cNvSpPr/>
           <p:nvPr/>
         </p:nvSpPr>
@@ -6268,7 +6320,7 @@
       </p:sp>
       <p:sp>
         <p:nvSpPr>
-          <p:cNvPr id="13" name="Rectangle 12"/>
+          <p:cNvPr id="14" name="Rectangle 13"/>
           <p:cNvSpPr/>
           <p:nvPr/>
         </p:nvSpPr>
@@ -6309,7 +6361,7 @@
       </p:sp>
       <p:sp>
         <p:nvSpPr>
-          <p:cNvPr id="14" name="Rectangle 13"/>
+          <p:cNvPr id="15" name="Rectangle 14"/>
           <p:cNvSpPr/>
           <p:nvPr/>
         </p:nvSpPr>
@@ -6350,7 +6402,7 @@
       </p:sp>
       <p:sp>
         <p:nvSpPr>
-          <p:cNvPr id="15" name="TextBox 14"/>
+          <p:cNvPr id="16" name="TextBox 15"/>
           <p:cNvSpPr txBox="1"/>
           <p:nvPr/>
         </p:nvSpPr>
@@ -6392,7 +6444,7 @@
       </p:sp>
       <p:sp>
         <p:nvSpPr>
-          <p:cNvPr id="16" name="TextBox 15"/>
+          <p:cNvPr id="17" name="TextBox 16"/>
           <p:cNvSpPr txBox="1"/>
           <p:nvPr/>
         </p:nvSpPr>
@@ -6472,7 +6524,7 @@
       </p:sp>
       <p:sp>
         <p:nvSpPr>
-          <p:cNvPr id="17" name="Rectangle 16"/>
+          <p:cNvPr id="18" name="Rectangle 17"/>
           <p:cNvSpPr/>
           <p:nvPr/>
         </p:nvSpPr>
@@ -6515,7 +6567,7 @@
       </p:sp>
       <p:sp>
         <p:nvSpPr>
-          <p:cNvPr id="18" name="Rectangle 17"/>
+          <p:cNvPr id="19" name="Rectangle 18"/>
           <p:cNvSpPr/>
           <p:nvPr/>
         </p:nvSpPr>
@@ -6556,7 +6608,7 @@
       </p:sp>
       <p:sp>
         <p:nvSpPr>
-          <p:cNvPr id="19" name="Rectangle 18"/>
+          <p:cNvPr id="20" name="Rectangle 19"/>
           <p:cNvSpPr/>
           <p:nvPr/>
         </p:nvSpPr>
@@ -6597,7 +6649,7 @@
       </p:sp>
       <p:sp>
         <p:nvSpPr>
-          <p:cNvPr id="20" name="TextBox 19"/>
+          <p:cNvPr id="21" name="TextBox 20"/>
           <p:cNvSpPr txBox="1"/>
           <p:nvPr/>
         </p:nvSpPr>
@@ -6639,7 +6691,7 @@
       </p:sp>
       <p:sp>
         <p:nvSpPr>
-          <p:cNvPr id="21" name="TextBox 20"/>
+          <p:cNvPr id="22" name="TextBox 21"/>
           <p:cNvSpPr txBox="1"/>
           <p:nvPr/>
         </p:nvSpPr>
@@ -6719,7 +6771,7 @@
       </p:sp>
       <p:sp>
         <p:nvSpPr>
-          <p:cNvPr id="22" name="Rectangle 21"/>
+          <p:cNvPr id="23" name="Rectangle 22"/>
           <p:cNvSpPr/>
           <p:nvPr/>
         </p:nvSpPr>
@@ -6760,7 +6812,7 @@
       </p:sp>
       <p:sp>
         <p:nvSpPr>
-          <p:cNvPr id="23" name="TextBox 22"/>
+          <p:cNvPr id="24" name="TextBox 23"/>
           <p:cNvSpPr txBox="1"/>
           <p:nvPr/>
         </p:nvSpPr>

--- a/assets/fiches/A5-fiche-complet.pptx
+++ b/assets/fiches/A5-fiche-complet.pptx
@@ -3084,9 +3084,12 @@
   <p:cSld>
     <p:bg>
       <p:bgPr>
-        <a:solidFill>
-          <a:srgbClr val="FFFFFF"/>
-        </a:solidFill>
+        <a:blipFill>
+          <a:blip r:embed="rId2"/>
+          <a:stretch>
+            <a:fillRect/>
+          </a:stretch>
+        </a:blipFill>
         <a:effectLst/>
       </p:bgPr>
     </p:bg>
@@ -3097,35 +3100,9 @@
         <p:nvPr/>
       </p:nvGrpSpPr>
       <p:grpSpPr/>
-      <p:pic>
-        <p:nvPicPr>
-          <p:cNvPr id="2" name="Picture 1" descr="bg-p1.png"/>
-          <p:cNvPicPr>
-            <a:picLocks noChangeAspect="1"/>
-          </p:cNvPicPr>
-          <p:nvPr/>
-        </p:nvPicPr>
-        <p:blipFill>
-          <a:blip r:embed="rId2">
-            <a:alphaModFix amt="80000"/>
-          </a:blip>
-          <a:stretch>
-            <a:fillRect/>
-          </a:stretch>
-        </p:blipFill>
-        <p:spPr>
-          <a:xfrm>
-            <a:off x="0" y="0"/>
-            <a:ext cx="7556399" cy="10692000"/>
-          </a:xfrm>
-          <a:prstGeom prst="rect">
-            <a:avLst/>
-          </a:prstGeom>
-        </p:spPr>
-      </p:pic>
-      <p:sp>
-        <p:nvSpPr>
-          <p:cNvPr id="3" name="TextBox 2"/>
+      <p:sp>
+        <p:nvSpPr>
+          <p:cNvPr id="2" name="TextBox 1"/>
           <p:cNvSpPr txBox="1"/>
           <p:nvPr/>
         </p:nvSpPr>
@@ -3186,7 +3163,7 @@
       </p:sp>
       <p:sp>
         <p:nvSpPr>
-          <p:cNvPr id="4" name="Rectangle 3"/>
+          <p:cNvPr id="3" name="Rectangle 2"/>
           <p:cNvSpPr/>
           <p:nvPr/>
         </p:nvSpPr>
@@ -3229,7 +3206,7 @@
       </p:sp>
       <p:sp>
         <p:nvSpPr>
-          <p:cNvPr id="5" name="TextBox 4"/>
+          <p:cNvPr id="4" name="TextBox 3"/>
           <p:cNvSpPr txBox="1"/>
           <p:nvPr/>
         </p:nvSpPr>
@@ -3347,7 +3324,7 @@
       </p:sp>
       <p:sp>
         <p:nvSpPr>
-          <p:cNvPr id="6" name="Rectangle 5"/>
+          <p:cNvPr id="5" name="Rectangle 4"/>
           <p:cNvSpPr/>
           <p:nvPr/>
         </p:nvSpPr>
@@ -3390,7 +3367,7 @@
       </p:sp>
       <p:sp>
         <p:nvSpPr>
-          <p:cNvPr id="7" name="TextBox 6"/>
+          <p:cNvPr id="6" name="TextBox 5"/>
           <p:cNvSpPr txBox="1"/>
           <p:nvPr/>
         </p:nvSpPr>
@@ -3508,7 +3485,7 @@
       </p:sp>
       <p:sp>
         <p:nvSpPr>
-          <p:cNvPr id="8" name="Rectangle 7"/>
+          <p:cNvPr id="7" name="Rectangle 6"/>
           <p:cNvSpPr/>
           <p:nvPr/>
         </p:nvSpPr>
@@ -3551,7 +3528,7 @@
       </p:sp>
       <p:sp>
         <p:nvSpPr>
-          <p:cNvPr id="9" name="Rectangle 8"/>
+          <p:cNvPr id="8" name="Rectangle 7"/>
           <p:cNvSpPr/>
           <p:nvPr/>
         </p:nvSpPr>
@@ -3592,7 +3569,7 @@
       </p:sp>
       <p:sp>
         <p:nvSpPr>
-          <p:cNvPr id="10" name="Rectangle 9"/>
+          <p:cNvPr id="9" name="Rectangle 8"/>
           <p:cNvSpPr/>
           <p:nvPr/>
         </p:nvSpPr>
@@ -3633,7 +3610,7 @@
       </p:sp>
       <p:sp>
         <p:nvSpPr>
-          <p:cNvPr id="11" name="TextBox 10"/>
+          <p:cNvPr id="10" name="TextBox 9"/>
           <p:cNvSpPr txBox="1"/>
           <p:nvPr/>
         </p:nvSpPr>
@@ -3675,7 +3652,7 @@
       </p:sp>
       <p:sp>
         <p:nvSpPr>
-          <p:cNvPr id="12" name="TextBox 11"/>
+          <p:cNvPr id="11" name="TextBox 10"/>
           <p:cNvSpPr txBox="1"/>
           <p:nvPr/>
         </p:nvSpPr>
@@ -3755,7 +3732,7 @@
       </p:sp>
       <p:sp>
         <p:nvSpPr>
-          <p:cNvPr id="13" name="Rectangle 12"/>
+          <p:cNvPr id="12" name="Rectangle 11"/>
           <p:cNvSpPr/>
           <p:nvPr/>
         </p:nvSpPr>
@@ -3798,7 +3775,7 @@
       </p:sp>
       <p:sp>
         <p:nvSpPr>
-          <p:cNvPr id="14" name="Rectangle 13"/>
+          <p:cNvPr id="13" name="Rectangle 12"/>
           <p:cNvSpPr/>
           <p:nvPr/>
         </p:nvSpPr>
@@ -3839,7 +3816,7 @@
       </p:sp>
       <p:sp>
         <p:nvSpPr>
-          <p:cNvPr id="15" name="Rectangle 14"/>
+          <p:cNvPr id="14" name="Rectangle 13"/>
           <p:cNvSpPr/>
           <p:nvPr/>
         </p:nvSpPr>
@@ -3880,7 +3857,7 @@
       </p:sp>
       <p:sp>
         <p:nvSpPr>
-          <p:cNvPr id="16" name="TextBox 15"/>
+          <p:cNvPr id="15" name="TextBox 14"/>
           <p:cNvSpPr txBox="1"/>
           <p:nvPr/>
         </p:nvSpPr>
@@ -3922,7 +3899,7 @@
       </p:sp>
       <p:sp>
         <p:nvSpPr>
-          <p:cNvPr id="17" name="TextBox 16"/>
+          <p:cNvPr id="16" name="TextBox 15"/>
           <p:cNvSpPr txBox="1"/>
           <p:nvPr/>
         </p:nvSpPr>
@@ -4002,7 +3979,7 @@
       </p:sp>
       <p:sp>
         <p:nvSpPr>
-          <p:cNvPr id="18" name="Rectangle 17"/>
+          <p:cNvPr id="17" name="Rectangle 16"/>
           <p:cNvSpPr/>
           <p:nvPr/>
         </p:nvSpPr>
@@ -4045,7 +4022,7 @@
       </p:sp>
       <p:sp>
         <p:nvSpPr>
-          <p:cNvPr id="19" name="Rectangle 18"/>
+          <p:cNvPr id="18" name="Rectangle 17"/>
           <p:cNvSpPr/>
           <p:nvPr/>
         </p:nvSpPr>
@@ -4086,7 +4063,7 @@
       </p:sp>
       <p:sp>
         <p:nvSpPr>
-          <p:cNvPr id="20" name="Rectangle 19"/>
+          <p:cNvPr id="19" name="Rectangle 18"/>
           <p:cNvSpPr/>
           <p:nvPr/>
         </p:nvSpPr>
@@ -4127,7 +4104,7 @@
       </p:sp>
       <p:sp>
         <p:nvSpPr>
-          <p:cNvPr id="21" name="TextBox 20"/>
+          <p:cNvPr id="20" name="TextBox 19"/>
           <p:cNvSpPr txBox="1"/>
           <p:nvPr/>
         </p:nvSpPr>
@@ -4169,7 +4146,7 @@
       </p:sp>
       <p:sp>
         <p:nvSpPr>
-          <p:cNvPr id="22" name="TextBox 21"/>
+          <p:cNvPr id="21" name="TextBox 20"/>
           <p:cNvSpPr txBox="1"/>
           <p:nvPr/>
         </p:nvSpPr>
@@ -4249,7 +4226,7 @@
       </p:sp>
       <p:sp>
         <p:nvSpPr>
-          <p:cNvPr id="23" name="Rectangle 22"/>
+          <p:cNvPr id="22" name="Rectangle 21"/>
           <p:cNvSpPr/>
           <p:nvPr/>
         </p:nvSpPr>
@@ -4292,7 +4269,7 @@
       </p:sp>
       <p:sp>
         <p:nvSpPr>
-          <p:cNvPr id="24" name="Rectangle 23"/>
+          <p:cNvPr id="23" name="Rectangle 22"/>
           <p:cNvSpPr/>
           <p:nvPr/>
         </p:nvSpPr>
@@ -4333,7 +4310,7 @@
       </p:sp>
       <p:sp>
         <p:nvSpPr>
-          <p:cNvPr id="25" name="Rectangle 24"/>
+          <p:cNvPr id="24" name="Rectangle 23"/>
           <p:cNvSpPr/>
           <p:nvPr/>
         </p:nvSpPr>
@@ -4374,7 +4351,7 @@
       </p:sp>
       <p:sp>
         <p:nvSpPr>
-          <p:cNvPr id="26" name="TextBox 25"/>
+          <p:cNvPr id="25" name="TextBox 24"/>
           <p:cNvSpPr txBox="1"/>
           <p:nvPr/>
         </p:nvSpPr>
@@ -4416,7 +4393,7 @@
       </p:sp>
       <p:sp>
         <p:nvSpPr>
-          <p:cNvPr id="27" name="TextBox 26"/>
+          <p:cNvPr id="26" name="TextBox 25"/>
           <p:cNvSpPr txBox="1"/>
           <p:nvPr/>
         </p:nvSpPr>
@@ -4496,7 +4473,7 @@
       </p:sp>
       <p:sp>
         <p:nvSpPr>
-          <p:cNvPr id="28" name="Rectangle 27"/>
+          <p:cNvPr id="27" name="Rectangle 26"/>
           <p:cNvSpPr/>
           <p:nvPr/>
         </p:nvSpPr>
@@ -4539,7 +4516,7 @@
       </p:sp>
       <p:sp>
         <p:nvSpPr>
-          <p:cNvPr id="29" name="Rectangle 28"/>
+          <p:cNvPr id="28" name="Rectangle 27"/>
           <p:cNvSpPr/>
           <p:nvPr/>
         </p:nvSpPr>
@@ -4580,7 +4557,7 @@
       </p:sp>
       <p:sp>
         <p:nvSpPr>
-          <p:cNvPr id="30" name="Rectangle 29"/>
+          <p:cNvPr id="29" name="Rectangle 28"/>
           <p:cNvSpPr/>
           <p:nvPr/>
         </p:nvSpPr>
@@ -4621,7 +4598,7 @@
       </p:sp>
       <p:sp>
         <p:nvSpPr>
-          <p:cNvPr id="31" name="TextBox 30"/>
+          <p:cNvPr id="30" name="TextBox 29"/>
           <p:cNvSpPr txBox="1"/>
           <p:nvPr/>
         </p:nvSpPr>
@@ -4663,7 +4640,7 @@
       </p:sp>
       <p:sp>
         <p:nvSpPr>
-          <p:cNvPr id="32" name="TextBox 31"/>
+          <p:cNvPr id="31" name="TextBox 30"/>
           <p:cNvSpPr txBox="1"/>
           <p:nvPr/>
         </p:nvSpPr>
@@ -4743,7 +4720,7 @@
       </p:sp>
       <p:sp>
         <p:nvSpPr>
-          <p:cNvPr id="33" name="Rectangle 32"/>
+          <p:cNvPr id="32" name="Rectangle 31"/>
           <p:cNvSpPr/>
           <p:nvPr/>
         </p:nvSpPr>
@@ -4786,7 +4763,7 @@
       </p:sp>
       <p:sp>
         <p:nvSpPr>
-          <p:cNvPr id="34" name="Rectangle 33"/>
+          <p:cNvPr id="33" name="Rectangle 32"/>
           <p:cNvSpPr/>
           <p:nvPr/>
         </p:nvSpPr>
@@ -4827,7 +4804,7 @@
       </p:sp>
       <p:sp>
         <p:nvSpPr>
-          <p:cNvPr id="35" name="Rectangle 34"/>
+          <p:cNvPr id="34" name="Rectangle 33"/>
           <p:cNvSpPr/>
           <p:nvPr/>
         </p:nvSpPr>
@@ -4868,7 +4845,7 @@
       </p:sp>
       <p:sp>
         <p:nvSpPr>
-          <p:cNvPr id="36" name="TextBox 35"/>
+          <p:cNvPr id="35" name="TextBox 34"/>
           <p:cNvSpPr txBox="1"/>
           <p:nvPr/>
         </p:nvSpPr>
@@ -4910,7 +4887,7 @@
       </p:sp>
       <p:sp>
         <p:nvSpPr>
-          <p:cNvPr id="37" name="TextBox 36"/>
+          <p:cNvPr id="36" name="TextBox 35"/>
           <p:cNvSpPr txBox="1"/>
           <p:nvPr/>
         </p:nvSpPr>
@@ -4990,7 +4967,7 @@
       </p:sp>
       <p:sp>
         <p:nvSpPr>
-          <p:cNvPr id="38" name="Rectangle 37"/>
+          <p:cNvPr id="37" name="Rectangle 36"/>
           <p:cNvSpPr/>
           <p:nvPr/>
         </p:nvSpPr>
@@ -5033,7 +5010,7 @@
       </p:sp>
       <p:sp>
         <p:nvSpPr>
-          <p:cNvPr id="39" name="Rectangle 38"/>
+          <p:cNvPr id="38" name="Rectangle 37"/>
           <p:cNvSpPr/>
           <p:nvPr/>
         </p:nvSpPr>
@@ -5074,7 +5051,7 @@
       </p:sp>
       <p:sp>
         <p:nvSpPr>
-          <p:cNvPr id="40" name="Rectangle 39"/>
+          <p:cNvPr id="39" name="Rectangle 38"/>
           <p:cNvSpPr/>
           <p:nvPr/>
         </p:nvSpPr>
@@ -5115,7 +5092,7 @@
       </p:sp>
       <p:sp>
         <p:nvSpPr>
-          <p:cNvPr id="41" name="TextBox 40"/>
+          <p:cNvPr id="40" name="TextBox 39"/>
           <p:cNvSpPr txBox="1"/>
           <p:nvPr/>
         </p:nvSpPr>
@@ -5157,7 +5134,7 @@
       </p:sp>
       <p:sp>
         <p:nvSpPr>
-          <p:cNvPr id="42" name="TextBox 41"/>
+          <p:cNvPr id="41" name="TextBox 40"/>
           <p:cNvSpPr txBox="1"/>
           <p:nvPr/>
         </p:nvSpPr>
@@ -5237,7 +5214,7 @@
       </p:sp>
       <p:sp>
         <p:nvSpPr>
-          <p:cNvPr id="43" name="Rectangle 42"/>
+          <p:cNvPr id="42" name="Rectangle 41"/>
           <p:cNvSpPr/>
           <p:nvPr/>
         </p:nvSpPr>
@@ -5280,7 +5257,7 @@
       </p:sp>
       <p:sp>
         <p:nvSpPr>
-          <p:cNvPr id="44" name="Rectangle 43"/>
+          <p:cNvPr id="43" name="Rectangle 42"/>
           <p:cNvSpPr/>
           <p:nvPr/>
         </p:nvSpPr>
@@ -5321,7 +5298,7 @@
       </p:sp>
       <p:sp>
         <p:nvSpPr>
-          <p:cNvPr id="45" name="Rectangle 44"/>
+          <p:cNvPr id="44" name="Rectangle 43"/>
           <p:cNvSpPr/>
           <p:nvPr/>
         </p:nvSpPr>
@@ -5362,7 +5339,7 @@
       </p:sp>
       <p:sp>
         <p:nvSpPr>
-          <p:cNvPr id="46" name="TextBox 45"/>
+          <p:cNvPr id="45" name="TextBox 44"/>
           <p:cNvSpPr txBox="1"/>
           <p:nvPr/>
         </p:nvSpPr>
@@ -5404,7 +5381,7 @@
       </p:sp>
       <p:sp>
         <p:nvSpPr>
-          <p:cNvPr id="47" name="TextBox 46"/>
+          <p:cNvPr id="46" name="TextBox 45"/>
           <p:cNvSpPr txBox="1"/>
           <p:nvPr/>
         </p:nvSpPr>
@@ -5484,7 +5461,7 @@
       </p:sp>
       <p:sp>
         <p:nvSpPr>
-          <p:cNvPr id="48" name="Rectangle 47"/>
+          <p:cNvPr id="47" name="Rectangle 46"/>
           <p:cNvSpPr/>
           <p:nvPr/>
         </p:nvSpPr>
@@ -5527,7 +5504,7 @@
       </p:sp>
       <p:sp>
         <p:nvSpPr>
-          <p:cNvPr id="49" name="Rectangle 48"/>
+          <p:cNvPr id="48" name="Rectangle 47"/>
           <p:cNvSpPr/>
           <p:nvPr/>
         </p:nvSpPr>
@@ -5568,7 +5545,7 @@
       </p:sp>
       <p:sp>
         <p:nvSpPr>
-          <p:cNvPr id="50" name="Rectangle 49"/>
+          <p:cNvPr id="49" name="Rectangle 48"/>
           <p:cNvSpPr/>
           <p:nvPr/>
         </p:nvSpPr>
@@ -5609,7 +5586,7 @@
       </p:sp>
       <p:sp>
         <p:nvSpPr>
-          <p:cNvPr id="51" name="TextBox 50"/>
+          <p:cNvPr id="50" name="TextBox 49"/>
           <p:cNvSpPr txBox="1"/>
           <p:nvPr/>
         </p:nvSpPr>
@@ -5651,7 +5628,7 @@
       </p:sp>
       <p:sp>
         <p:nvSpPr>
-          <p:cNvPr id="52" name="TextBox 51"/>
+          <p:cNvPr id="51" name="TextBox 50"/>
           <p:cNvSpPr txBox="1"/>
           <p:nvPr/>
         </p:nvSpPr>
@@ -5742,9 +5719,12 @@
   <p:cSld>
     <p:bg>
       <p:bgPr>
-        <a:solidFill>
-          <a:srgbClr val="FFFFFF"/>
-        </a:solidFill>
+        <a:blipFill>
+          <a:blip r:embed="rId2"/>
+          <a:stretch>
+            <a:fillRect/>
+          </a:stretch>
+        </a:blipFill>
         <a:effectLst/>
       </p:bgPr>
     </p:bg>
@@ -5755,35 +5735,9 @@
         <p:nvPr/>
       </p:nvGrpSpPr>
       <p:grpSpPr/>
-      <p:pic>
-        <p:nvPicPr>
-          <p:cNvPr id="2" name="Picture 1" descr="bg-p2.png"/>
-          <p:cNvPicPr>
-            <a:picLocks noChangeAspect="1"/>
-          </p:cNvPicPr>
-          <p:nvPr/>
-        </p:nvPicPr>
-        <p:blipFill>
-          <a:blip r:embed="rId2">
-            <a:alphaModFix amt="80000"/>
-          </a:blip>
-          <a:stretch>
-            <a:fillRect/>
-          </a:stretch>
-        </p:blipFill>
-        <p:spPr>
-          <a:xfrm>
-            <a:off x="0" y="0"/>
-            <a:ext cx="7556399" cy="10692000"/>
-          </a:xfrm>
-          <a:prstGeom prst="rect">
-            <a:avLst/>
-          </a:prstGeom>
-        </p:spPr>
-      </p:pic>
-      <p:sp>
-        <p:nvSpPr>
-          <p:cNvPr id="3" name="Rectangle 2"/>
+      <p:sp>
+        <p:nvSpPr>
+          <p:cNvPr id="2" name="Rectangle 1"/>
           <p:cNvSpPr/>
           <p:nvPr/>
         </p:nvSpPr>
@@ -5826,7 +5780,7 @@
       </p:sp>
       <p:sp>
         <p:nvSpPr>
-          <p:cNvPr id="4" name="Rectangle 3"/>
+          <p:cNvPr id="3" name="Rectangle 2"/>
           <p:cNvSpPr/>
           <p:nvPr/>
         </p:nvSpPr>
@@ -5867,7 +5821,7 @@
       </p:sp>
       <p:sp>
         <p:nvSpPr>
-          <p:cNvPr id="5" name="Rectangle 4"/>
+          <p:cNvPr id="4" name="Rectangle 3"/>
           <p:cNvSpPr/>
           <p:nvPr/>
         </p:nvSpPr>
@@ -5908,7 +5862,7 @@
       </p:sp>
       <p:sp>
         <p:nvSpPr>
-          <p:cNvPr id="6" name="TextBox 5"/>
+          <p:cNvPr id="5" name="TextBox 4"/>
           <p:cNvSpPr txBox="1"/>
           <p:nvPr/>
         </p:nvSpPr>
@@ -5950,7 +5904,7 @@
       </p:sp>
       <p:sp>
         <p:nvSpPr>
-          <p:cNvPr id="7" name="TextBox 6"/>
+          <p:cNvPr id="6" name="TextBox 5"/>
           <p:cNvSpPr txBox="1"/>
           <p:nvPr/>
         </p:nvSpPr>
@@ -6030,7 +5984,7 @@
       </p:sp>
       <p:sp>
         <p:nvSpPr>
-          <p:cNvPr id="8" name="Rectangle 7"/>
+          <p:cNvPr id="7" name="Rectangle 6"/>
           <p:cNvSpPr/>
           <p:nvPr/>
         </p:nvSpPr>
@@ -6073,7 +6027,7 @@
       </p:sp>
       <p:sp>
         <p:nvSpPr>
-          <p:cNvPr id="9" name="Rectangle 8"/>
+          <p:cNvPr id="8" name="Rectangle 7"/>
           <p:cNvSpPr/>
           <p:nvPr/>
         </p:nvSpPr>
@@ -6114,7 +6068,7 @@
       </p:sp>
       <p:sp>
         <p:nvSpPr>
-          <p:cNvPr id="10" name="Rectangle 9"/>
+          <p:cNvPr id="9" name="Rectangle 8"/>
           <p:cNvSpPr/>
           <p:nvPr/>
         </p:nvSpPr>
@@ -6155,7 +6109,7 @@
       </p:sp>
       <p:sp>
         <p:nvSpPr>
-          <p:cNvPr id="11" name="TextBox 10"/>
+          <p:cNvPr id="10" name="TextBox 9"/>
           <p:cNvSpPr txBox="1"/>
           <p:nvPr/>
         </p:nvSpPr>
@@ -6197,7 +6151,7 @@
       </p:sp>
       <p:sp>
         <p:nvSpPr>
-          <p:cNvPr id="12" name="TextBox 11"/>
+          <p:cNvPr id="11" name="TextBox 10"/>
           <p:cNvSpPr txBox="1"/>
           <p:nvPr/>
         </p:nvSpPr>
@@ -6277,7 +6231,7 @@
       </p:sp>
       <p:sp>
         <p:nvSpPr>
-          <p:cNvPr id="13" name="Rectangle 12"/>
+          <p:cNvPr id="12" name="Rectangle 11"/>
           <p:cNvSpPr/>
           <p:nvPr/>
         </p:nvSpPr>
@@ -6320,7 +6274,7 @@
       </p:sp>
       <p:sp>
         <p:nvSpPr>
-          <p:cNvPr id="14" name="Rectangle 13"/>
+          <p:cNvPr id="13" name="Rectangle 12"/>
           <p:cNvSpPr/>
           <p:nvPr/>
         </p:nvSpPr>
@@ -6361,7 +6315,7 @@
       </p:sp>
       <p:sp>
         <p:nvSpPr>
-          <p:cNvPr id="15" name="Rectangle 14"/>
+          <p:cNvPr id="14" name="Rectangle 13"/>
           <p:cNvSpPr/>
           <p:nvPr/>
         </p:nvSpPr>
@@ -6402,7 +6356,7 @@
       </p:sp>
       <p:sp>
         <p:nvSpPr>
-          <p:cNvPr id="16" name="TextBox 15"/>
+          <p:cNvPr id="15" name="TextBox 14"/>
           <p:cNvSpPr txBox="1"/>
           <p:nvPr/>
         </p:nvSpPr>
@@ -6444,7 +6398,7 @@
       </p:sp>
       <p:sp>
         <p:nvSpPr>
-          <p:cNvPr id="17" name="TextBox 16"/>
+          <p:cNvPr id="16" name="TextBox 15"/>
           <p:cNvSpPr txBox="1"/>
           <p:nvPr/>
         </p:nvSpPr>
@@ -6524,7 +6478,7 @@
       </p:sp>
       <p:sp>
         <p:nvSpPr>
-          <p:cNvPr id="18" name="Rectangle 17"/>
+          <p:cNvPr id="17" name="Rectangle 16"/>
           <p:cNvSpPr/>
           <p:nvPr/>
         </p:nvSpPr>
@@ -6567,7 +6521,7 @@
       </p:sp>
       <p:sp>
         <p:nvSpPr>
-          <p:cNvPr id="19" name="Rectangle 18"/>
+          <p:cNvPr id="18" name="Rectangle 17"/>
           <p:cNvSpPr/>
           <p:nvPr/>
         </p:nvSpPr>
@@ -6608,7 +6562,7 @@
       </p:sp>
       <p:sp>
         <p:nvSpPr>
-          <p:cNvPr id="20" name="Rectangle 19"/>
+          <p:cNvPr id="19" name="Rectangle 18"/>
           <p:cNvSpPr/>
           <p:nvPr/>
         </p:nvSpPr>
@@ -6649,7 +6603,7 @@
       </p:sp>
       <p:sp>
         <p:nvSpPr>
-          <p:cNvPr id="21" name="TextBox 20"/>
+          <p:cNvPr id="20" name="TextBox 19"/>
           <p:cNvSpPr txBox="1"/>
           <p:nvPr/>
         </p:nvSpPr>
@@ -6691,7 +6645,7 @@
       </p:sp>
       <p:sp>
         <p:nvSpPr>
-          <p:cNvPr id="22" name="TextBox 21"/>
+          <p:cNvPr id="21" name="TextBox 20"/>
           <p:cNvSpPr txBox="1"/>
           <p:nvPr/>
         </p:nvSpPr>
@@ -6771,7 +6725,7 @@
       </p:sp>
       <p:sp>
         <p:nvSpPr>
-          <p:cNvPr id="23" name="Rectangle 22"/>
+          <p:cNvPr id="22" name="Rectangle 21"/>
           <p:cNvSpPr/>
           <p:nvPr/>
         </p:nvSpPr>
@@ -6812,7 +6766,7 @@
       </p:sp>
       <p:sp>
         <p:nvSpPr>
-          <p:cNvPr id="24" name="TextBox 23"/>
+          <p:cNvPr id="23" name="TextBox 22"/>
           <p:cNvSpPr txBox="1"/>
           <p:nvPr/>
         </p:nvSpPr>
